--- a/405 Slide Revisions 2026/Module 2/Videos Final/Module 2 - Video 1 - Elasticity and Revenue.pptx
+++ b/405 Slide Revisions 2026/Module 2/Videos Final/Module 2 - Video 1 - Elasticity and Revenue.pptx
@@ -531,45 +531,101 @@
           <a:lstStyle/>
           <a:p>
             <a:r>
+              <a:rPr dirty="0"/>
               <a:t>We can now explore the relationship between the elasticity of demand and total revenue. Total revenue is defined as ⟪𝑇𝑅⟫⟪=⟫⟪𝑃⟫⟪∙⟫⟪𝑄⟫. Starting at the leftmost portion of the graph, when ⟪𝑄⟫⟪=0⟫, we know that ⟪𝑇𝑅⟫⟪=0⟫. As the price falls, quantity rises. Note that these changes have opposing effects on total revenue. Since we are on the elastic portion of the demand curve, we know that a small decrease in price causes a large increase in quantity, and total revenue increases. This pattern will hold as price falls through the point of unit elasticity on the demand curve. At this point, total revenue reaches its maximum. After this point, we enter the inelastic portion of the demand curve. On the inelastic portion of the demand curve, we know that a small decrease in price causes an even smaller increase in quantity, and total revenue falls. Total revenue continues to fall until the demand curve intersects the x-axis, where ⟪𝑃⟫⟪=0⟫, and ⟪𝑇𝑅⟫⟪=0⟫.</a:t>
             </a:r>
           </a:p>
           <a:p>
-            <a:endParaRPr/>
-          </a:p>
-          <a:p>
-            <a:r>
+            <a:endParaRPr dirty="0"/>
+          </a:p>
+          <a:p>
+            <a:r>
+              <a:rPr dirty="0"/>
               <a:t>When you lower your price and move down the demand curve, there are two effects on revenues: 1) a positive effect from more quantity sold and 2) a negative effect from a lower price per unit. Which area is bigger? It depends on the elasticity of demand.</a:t>
             </a:r>
           </a:p>
           <a:p>
             <a:r>
+              <a:rPr dirty="0"/>
               <a:t> </a:t>
             </a:r>
           </a:p>
           <a:p>
             <a:r>
-              <a:t>Case of elastic demand: TR=P×Q. If P ↓ by 10% and Q ↑ by 20%, TR ↑. In the elastic zone of the demand curve (low Q, high P), the revenue curve rises. What can we say about the direction in which profits move here? It is ambiguous because of costs. Since quantity sold is rising, costs are also (weakly) rising. Profit can rise or fall, depending on how much costs increase.</a:t>
-            </a:r>
-          </a:p>
-          <a:p>
-            <a:r>
+              <a:rPr dirty="0"/>
+              <a:t>Case of elastic demand: TR=</a:t>
+            </a:r>
+            <a:r>
+              <a:rPr dirty="0" err="1"/>
+              <a:t>P×Q</a:t>
+            </a:r>
+            <a:r>
+              <a:rPr dirty="0"/>
+              <a:t>. If P ↓ by 10% and Q ↑ by 20%, TR ↑. In the elastic zone of the demand curve (low Q, high P), the revenue curve rises. What can we say about the direction in which profits move here? It is ambiguous because of costs. Since quantity sold is rising, costs are also (weakly) rising. Profit can rise or fall, depending on how much costs increase.</a:t>
+            </a:r>
+          </a:p>
+          <a:p>
+            <a:r>
+              <a:rPr dirty="0"/>
               <a:t> </a:t>
             </a:r>
           </a:p>
           <a:p>
             <a:r>
-              <a:t>Case of inelastic demand: TR=P×Q. If P ↓ by 10% and Q ↑ by 5%, TR ↓. In the inelastic zone of the demand curve (high Q, low P), the revenue curve is downward sloping. The prescription is clear here. If you are on the inelastic part of the demand curve, raise the price. Revenues rise, you sell less, so costs go down. Since revenues rise and costs go down, you know profits must be going up. </a:t>
-            </a:r>
-          </a:p>
-          <a:p>
-            <a:r>
+              <a:rPr dirty="0"/>
+              <a:t>Case of inelastic demand: TR=</a:t>
+            </a:r>
+            <a:r>
+              <a:rPr dirty="0" err="1"/>
+              <a:t>P×Q</a:t>
+            </a:r>
+            <a:r>
+              <a:rPr dirty="0"/>
+              <a:t>. If P ↓ by 10% and Q ↑ by 5%, TR ↓. In the inelastic zone of the demand curve (high Q, low P), the revenue curve is downward sloping. The prescription is clear here. If you are on the inelastic part of the demand curve, raise the price. Revenues rise, you sell less, so costs go down. Since revenues rise and costs go down, you know profits must be going up. </a:t>
+            </a:r>
+          </a:p>
+          <a:p>
+            <a:r>
+              <a:rPr dirty="0"/>
               <a:t> </a:t>
             </a:r>
           </a:p>
           <a:p>
             <a:r>
-              <a:t>Does that mean that profits are maximized when E_d=-1? No. When E_d=-1, revenues are maximized. Marginal revenue is zero. That is not the same as MR=MC. Only when MR=MC are profits maximized. Usually, this is when E_d&lt;-1, i.e. in the elastic zone of the demand curve, where MR is positive and allows you to cover marginal cost. You only want to stop at MR=0 (E_d=-1) if MC=0.</a:t>
+              <a:rPr dirty="0"/>
+              <a:t>Does that mean that profits are maximized when </a:t>
+            </a:r>
+            <a:r>
+              <a:rPr dirty="0" err="1"/>
+              <a:t>E_d</a:t>
+            </a:r>
+            <a:r>
+              <a:rPr dirty="0"/>
+              <a:t>=-1? No. When </a:t>
+            </a:r>
+            <a:r>
+              <a:rPr dirty="0" err="1"/>
+              <a:t>E_d</a:t>
+            </a:r>
+            <a:r>
+              <a:rPr dirty="0"/>
+              <a:t>=-1, revenues are maximized. Marginal revenue is zero. That is not the same as MR=MC. Only when MR=MC are profits maximized. Usually, this is when </a:t>
+            </a:r>
+            <a:r>
+              <a:rPr dirty="0" err="1"/>
+              <a:t>E_d</a:t>
+            </a:r>
+            <a:r>
+              <a:rPr dirty="0"/>
+              <a:t>&lt;-1, i.e. in the elastic zone of the demand curve, where MR is positive and allows you to cover marginal cost. You only want to stop at MR=0 (</a:t>
+            </a:r>
+            <a:r>
+              <a:rPr dirty="0" err="1"/>
+              <a:t>E_d</a:t>
+            </a:r>
+            <a:r>
+              <a:rPr dirty="0"/>
+              <a:t>=-1) if MC=0.</a:t>
             </a:r>
           </a:p>
         </p:txBody>
@@ -639,45 +695,101 @@
           <a:lstStyle/>
           <a:p>
             <a:r>
+              <a:rPr dirty="0"/>
               <a:t>We can now explore the relationship between the elasticity of demand and total revenue. Total revenue is defined as ⟪𝑇𝑅⟫⟪=⟫⟪𝑃⟫⟪∙⟫⟪𝑄⟫. Starting at the leftmost portion of the graph, when ⟪𝑄⟫⟪=0⟫, we know that ⟪𝑇𝑅⟫⟪=0⟫. As the price falls, quantity rises. Note that these changes have opposing effects on total revenue. Since we are on the elastic portion of the demand curve, we know that a small decrease in price causes a large increase in quantity, and total revenue increases. This pattern will hold as price falls through the point of unit elasticity on the demand curve. At this point, total revenue reaches its maximum. After this point, we enter the inelastic portion of the demand curve. On the inelastic portion of the demand curve, we know that a small decrease in price causes an even smaller increase in quantity, and total revenue falls. Total revenue continues to fall until the demand curve intersects the x-axis, where ⟪𝑃⟫⟪=0⟫, and ⟪𝑇𝑅⟫⟪=0⟫.</a:t>
             </a:r>
           </a:p>
           <a:p>
-            <a:endParaRPr/>
-          </a:p>
-          <a:p>
-            <a:r>
+            <a:endParaRPr dirty="0"/>
+          </a:p>
+          <a:p>
+            <a:r>
+              <a:rPr dirty="0"/>
               <a:t>When you lower your price and move down the demand curve, there are two effects on revenues: 1) a positive effect from more quantity sold and 2) a negative effect from a lower price per unit. Which area is bigger? It depends on the elasticity of demand.</a:t>
             </a:r>
           </a:p>
           <a:p>
             <a:r>
+              <a:rPr dirty="0"/>
               <a:t> </a:t>
             </a:r>
           </a:p>
           <a:p>
             <a:r>
-              <a:t>Case of elastic demand: TR=P×Q. If P ↓ by 10% and Q ↑ by 20%, TR ↑. In the elastic zone of the demand curve (low Q, high P), the revenue curve rises. What can we say about the direction in which profits move here? It is ambiguous because of costs. Since quantity sold is rising, costs are also (weakly) rising. Profit can rise or fall, depending on how much costs increase.</a:t>
-            </a:r>
-          </a:p>
-          <a:p>
-            <a:r>
+              <a:rPr dirty="0"/>
+              <a:t>Case of elastic demand: TR=</a:t>
+            </a:r>
+            <a:r>
+              <a:rPr dirty="0" err="1"/>
+              <a:t>P×Q</a:t>
+            </a:r>
+            <a:r>
+              <a:rPr dirty="0"/>
+              <a:t>. If P ↓ by 10% and Q ↑ by 20%, TR ↑. In the elastic zone of the demand curve (low Q, high P), the revenue curve rises. What can we say about the direction in which profits move here? It is ambiguous because of costs. Since quantity sold is rising, costs are also (weakly) rising. Profit can rise or fall, depending on how much costs increase.</a:t>
+            </a:r>
+          </a:p>
+          <a:p>
+            <a:r>
+              <a:rPr dirty="0"/>
               <a:t> </a:t>
             </a:r>
           </a:p>
           <a:p>
             <a:r>
-              <a:t>Case of inelastic demand: TR=P×Q. If P ↓ by 10% and Q ↑ by 5%, TR ↓. In the inelastic zone of the demand curve (high Q, low P), the revenue curve is downward sloping. The prescription is clear here. If you are on the inelastic part of the demand curve, raise the price. Revenues rise, you sell less, so costs go down. Since revenues rise and costs go down, you know profits must be going up. </a:t>
-            </a:r>
-          </a:p>
-          <a:p>
-            <a:r>
+              <a:rPr dirty="0"/>
+              <a:t>Case of inelastic demand: TR=</a:t>
+            </a:r>
+            <a:r>
+              <a:rPr dirty="0" err="1"/>
+              <a:t>P×Q</a:t>
+            </a:r>
+            <a:r>
+              <a:rPr dirty="0"/>
+              <a:t>. If P ↓ by 10% and Q ↑ by 5%, TR ↓. In the inelastic zone of the demand curve (high Q, low P), the revenue curve is downward sloping. The prescription is clear here. If you are on the inelastic part of the demand curve, raise the price. Revenues rise, you sell less, so costs go down. Since revenues rise and costs go down, you know profits must be going up. </a:t>
+            </a:r>
+          </a:p>
+          <a:p>
+            <a:r>
+              <a:rPr dirty="0"/>
               <a:t> </a:t>
             </a:r>
           </a:p>
           <a:p>
             <a:r>
-              <a:t>Does that mean that profits are maximized when E_d=-1? No. When E_d=-1, revenues are maximized. Marginal revenue is zero. That is not the same as MR=MC. Only when MR=MC are profits maximized. Usually, this is when E_d&lt;-1, i.e. in the elastic zone of the demand curve, where MR is positive and allows you to cover marginal cost. You only want to stop at MR=0 (E_d=-1) if MC=0.</a:t>
+              <a:rPr dirty="0"/>
+              <a:t>Does that mean that profits are maximized when </a:t>
+            </a:r>
+            <a:r>
+              <a:rPr dirty="0" err="1"/>
+              <a:t>E_d</a:t>
+            </a:r>
+            <a:r>
+              <a:rPr dirty="0"/>
+              <a:t>=-1? No. When </a:t>
+            </a:r>
+            <a:r>
+              <a:rPr dirty="0" err="1"/>
+              <a:t>E_d</a:t>
+            </a:r>
+            <a:r>
+              <a:rPr dirty="0"/>
+              <a:t>=-1, revenues are maximized. Marginal revenue is zero. That is not the same as MR=MC. Only when MR=MC are profits maximized. Usually, this is when </a:t>
+            </a:r>
+            <a:r>
+              <a:rPr dirty="0" err="1"/>
+              <a:t>E_d</a:t>
+            </a:r>
+            <a:r>
+              <a:rPr dirty="0"/>
+              <a:t>&lt;-1, i.e. in the elastic zone of the demand curve, where MR is positive and allows you to cover marginal cost. You only want to stop at MR=0 (</a:t>
+            </a:r>
+            <a:r>
+              <a:rPr dirty="0" err="1"/>
+              <a:t>E_d</a:t>
+            </a:r>
+            <a:r>
+              <a:rPr dirty="0"/>
+              <a:t>=-1) if MC=0.</a:t>
             </a:r>
           </a:p>
         </p:txBody>
@@ -976,6 +1088,7 @@
           <a:lstStyle/>
           <a:p>
             <a:r>
+              <a:rPr dirty="0"/>
               <a:t>One step further: profit is revenue minus costs. The price cut reduced revenue, and because quantity sold rises, production costs rise too — so profits fall on both ends. The market agreed: when Novo Nordisk warned in February 2026 that lower U.S. prices would push 2026 sales and operating profit down 5 to 13%, its shares tumbled about 18%.</a:t>
             </a:r>
           </a:p>
@@ -4221,7 +4334,7 @@
           <a:p>
             <a:pPr algn="ctr"/>
             <a:r>
-              <a:rPr sz="2200" b="0" i="0" u="none">
+              <a:rPr sz="2200" b="0" i="0" u="none" dirty="0">
                 <a:solidFill>
                   <a:srgbClr val="555B66"/>
                 </a:solidFill>
@@ -4700,7 +4813,7 @@
               <a:rPr lang="en-US" dirty="0">
                 <a:latin typeface="Calibri"/>
               </a:rPr>
-              <a:t>A declining price also raises quantity produce/sold Q</a:t>
+              <a:t>A declining price also raises quantity produced/sold Q</a:t>
             </a:r>
             <a:r>
               <a:rPr dirty="0">
@@ -4877,7 +4990,7 @@
           <a:p>
             <a:pPr algn="l"/>
             <a:r>
-              <a:rPr sz="1200" b="0" i="0" u="none">
+              <a:rPr sz="1200" b="0" i="0" u="none" dirty="0">
                 <a:solidFill>
                   <a:srgbClr val="555B66"/>
                 </a:solidFill>
@@ -18436,7 +18549,7 @@
             </a:r>
             <a:r>
               <a:rPr lang="en-US" dirty="0"/>
-              <a:t>=0 (unit elastic)?</a:t>
+              <a:t>=-1 (unit elastic)?</a:t>
             </a:r>
           </a:p>
           <a:p>
